--- a/10-plantas/01-steelmaking/05-capacitacion/MO-CC2-08/MO-CC2-08_Capacitacion_AMMX.pptx
+++ b/10-plantas/01-steelmaking/05-capacitacion/MO-CC2-08/MO-CC2-08_Capacitacion_AMMX.pptx
@@ -3493,7 +3493,7 @@
                 <a:ea typeface="Century Gothic" pitchFamily="34" charset="-122"/>
                 <a:cs typeface="Century Gothic" pitchFamily="34" charset="-120"/>
               </a:rPr>
-              <a:t>Para: S-16 Corte y Marcado · S-17 Mesa y Despacho · Grúa de producto · S-12 · S-18 · C-06</a:t>
+              <a:t>Para: S-16 Corte y Marcado · S-17 Mesa y Despacho · Grúa de producto 25 t (hoy S-17) · S-12 · S-18 · C-06</a:t>
             </a:r>
             <a:endParaRPr lang="en-US" sz="1100" dirty="0"/>
           </a:p>
@@ -13037,7 +13037,7 @@
                           <a:ea typeface="Century Gothic" pitchFamily="34" charset="-122"/>
                           <a:cs typeface="Century Gothic" pitchFamily="34" charset="-120"/>
                         </a:rPr>
-                        <a:t>12 meses (izaje)</a:t>
+                        <a:t>24 meses; izaje 12</a:t>
                       </a:r>
                       <a:endParaRPr lang="en-US" sz="950" dirty="0">
                         <a:latin typeface="Century Gothic" charset="0"/>
@@ -16018,7 +16018,7 @@
                 <a:ea typeface="Calibri" pitchFamily="34" charset="-122"/>
                 <a:cs typeface="Calibri" pitchFamily="34" charset="-120"/>
               </a:rPr>
-              <a:t>Siguiente paso: OJT supervisado y evaluación práctica (TD-P07); registro en IMaS y DC-3/SIRCE. Validación: visto bueno técnica (pendientes: seguridad, laboral, diseño instruccional).</a:t>
+              <a:t>Siguiente paso: OJT supervisado y evaluación práctica (TD-P07); registro en IMaS y DC-3/SIRCE. Validación: visto bueno técnica, seguridad, laboral, diseño instruccional.</a:t>
             </a:r>
             <a:endParaRPr lang="en-US" sz="750" dirty="0"/>
           </a:p>
@@ -18517,7 +18517,7 @@
                           <a:ea typeface="Century Gothic" pitchFamily="34" charset="-122"/>
                           <a:cs typeface="Century Gothic" pitchFamily="34" charset="-120"/>
                         </a:rPr>
-                        <a:t>Opera transferencia y lecho; forma lotes; dirige la grúa; despacha</a:t>
+                        <a:t>Opera transferencia y lecho; forma lotes; da señales a la grúa; despacha</a:t>
                       </a:r>
                       <a:endParaRPr lang="en-US" sz="1100" dirty="0">
                         <a:latin typeface="Century Gothic" charset="0"/>
@@ -26918,7 +26918,7 @@
                 <a:ea typeface="Century Gothic" pitchFamily="34" charset="-122"/>
                 <a:cs typeface="Century Gothic" pitchFamily="34" charset="-120"/>
               </a:rPr>
-              <a:t>Gases, carga suspendida y acero caliente en movimiento</a:t>
+              <a:t>Gases, carga suspendida y acero caliente: aléjate</a:t>
             </a:r>
             <a:endParaRPr lang="en-US" sz="2400" dirty="0"/>
           </a:p>
